--- a/答辩PPT.pptx
+++ b/答辩PPT.pptx
@@ -254,7 +254,7 @@
   <p:extLst>
     <p:ext uri="{EFAFB233-063F-42B5-8137-9DF3F51BA10A}">
       <p15:sldGuideLst xmlns:p15="http://schemas.microsoft.com/office/powerpoint/2012/main">
-        <p15:guide id="1" orient="horz" pos="1680" userDrawn="1">
+        <p15:guide id="1" orient="horz" pos="1674" userDrawn="1">
           <p15:clr>
             <a:srgbClr val="747775"/>
           </p15:clr>
@@ -13535,7 +13535,7 @@
         </p:nvSpPr>
         <p:spPr>
           <a:xfrm>
-            <a:off x="762000" y="2794000"/>
+            <a:off x="762000" y="3000375"/>
             <a:ext cx="3556000" cy="508000"/>
           </a:xfrm>
           <a:prstGeom prst="rect">
@@ -13559,7 +13559,7 @@
               <a:defRPr/>
             </a:pPr>
             <a:r>
-              <a:rPr lang="en-US" sz="1400" b="0" i="0" u="none" strike="noStrike">
+              <a:rPr lang="en-US" sz="3600" b="0" i="0" u="none" strike="noStrike">
                 <a:solidFill>
                   <a:srgbClr val="C9A66B"/>
                 </a:solidFill>
@@ -13570,88 +13570,7 @@
               </a:rPr>
               <a:t>制造智能技术课程设计</a:t>
             </a:r>
-            <a:endParaRPr lang="en-US" sz="1100"/>
-          </a:p>
-        </p:txBody>
-      </p:sp>
-      <p:sp>
-        <p:nvSpPr>
-          <p:cNvPr id="5" name="AutoShape 5"/>
-          <p:cNvSpPr/>
-          <p:nvPr/>
-        </p:nvSpPr>
-        <p:spPr>
-          <a:xfrm>
-            <a:off x="762000" y="5588000"/>
-            <a:ext cx="3556000" cy="762000"/>
-          </a:xfrm>
-          <a:prstGeom prst="rect">
-            <a:avLst/>
-          </a:prstGeom>
-          <a:noFill/>
-          <a:ln w="12700" cap="flat" cmpd="sng">
-            <a:noFill/>
-            <a:prstDash val="solid"/>
-            <a:round/>
-          </a:ln>
-        </p:spPr>
-        <p:txBody>
-          <a:bodyPr vert="horz" wrap="square" lIns="0" tIns="0" rIns="0" bIns="0" rtlCol="0" anchor="ctr" anchorCtr="0"/>
-          <a:lstStyle/>
-          <a:p>
-            <a:pPr marL="0" indent="0" algn="l">
-              <a:lnSpc>
-                <a:spcPct val="133000"/>
-              </a:lnSpc>
-              <a:defRPr/>
-            </a:pPr>
-            <a:r>
-              <a:rPr lang="en-US" sz="1100" b="0" i="0" u="none" strike="noStrike">
-                <a:solidFill>
-                  <a:srgbClr val="FFFFFF">
-                    <a:alpha val="50196"/>
-                  </a:srgbClr>
-                </a:solidFill>
-                <a:latin typeface="Noto Serif SC" panose="02020200000000000000" charset="-122"/>
-                <a:ea typeface="Noto Serif SC" panose="02020200000000000000" charset="-122"/>
-                <a:cs typeface="Noto Serif SC" panose="02020200000000000000" charset="-122"/>
-                <a:sym typeface="Noto Serif SC" panose="02020200000000000000" charset="-122"/>
-              </a:rPr>
-              <a:t>智造24.1 李旺</a:t>
-            </a:r>
-            <a:endParaRPr lang="en-US" sz="1100"/>
-          </a:p>
-          <a:p>
-            <a:pPr marL="0" indent="0" algn="l">
-              <a:lnSpc>
-                <a:spcPct val="133000"/>
-              </a:lnSpc>
-            </a:pPr>
-            <a:r>
-              <a:rPr lang="en-US" sz="1100" b="0" i="0" u="none" strike="noStrike">
-                <a:solidFill>
-                  <a:srgbClr val="FFFFFF">
-                    <a:alpha val="50196"/>
-                  </a:srgbClr>
-                </a:solidFill>
-                <a:latin typeface="Noto Serif SC" panose="02020200000000000000" charset="-122"/>
-                <a:ea typeface="Noto Serif SC" panose="02020200000000000000" charset="-122"/>
-                <a:cs typeface="Noto Serif SC" panose="02020200000000000000" charset="-122"/>
-                <a:sym typeface="Noto Serif SC" panose="02020200000000000000" charset="-122"/>
-              </a:rPr>
-              <a:t>202412020108</a:t>
-            </a:r>
-            <a:endParaRPr lang="en-US" sz="1100" b="0" i="0" u="none" strike="noStrike">
-              <a:solidFill>
-                <a:srgbClr val="FFFFFF">
-                  <a:alpha val="50196"/>
-                </a:srgbClr>
-              </a:solidFill>
-              <a:latin typeface="Noto Serif SC" panose="02020200000000000000" charset="-122"/>
-              <a:ea typeface="Noto Serif SC" panose="02020200000000000000" charset="-122"/>
-              <a:cs typeface="Noto Serif SC" panose="02020200000000000000" charset="-122"/>
-              <a:sym typeface="Noto Serif SC" panose="02020200000000000000" charset="-122"/>
-            </a:endParaRPr>
+            <a:endParaRPr lang="en-US" sz="3600"/>
           </a:p>
         </p:txBody>
       </p:sp>
@@ -13884,26 +13803,6 @@
                 <a:sym typeface="Noto Serif SC" panose="02020200000000000000" charset="-122"/>
               </a:rPr>
               <a:t>汇报人：李旺 班级：智造24.1</a:t>
-            </a:r>
-            <a:endParaRPr lang="en-US" sz="1100"/>
-          </a:p>
-          <a:p>
-            <a:pPr marL="0" indent="0" algn="l">
-              <a:lnSpc>
-                <a:spcPct val="150000"/>
-              </a:lnSpc>
-            </a:pPr>
-            <a:r>
-              <a:rPr lang="en-US" sz="1300" b="0" i="0" u="none" strike="noStrike">
-                <a:solidFill>
-                  <a:srgbClr val="465667"/>
-                </a:solidFill>
-                <a:latin typeface="Noto Serif SC" panose="02020200000000000000" charset="-122"/>
-                <a:ea typeface="Noto Serif SC" panose="02020200000000000000" charset="-122"/>
-                <a:cs typeface="Noto Serif SC" panose="02020200000000000000" charset="-122"/>
-                <a:sym typeface="Noto Serif SC" panose="02020200000000000000" charset="-122"/>
-              </a:rPr>
-              <a:t>学号：202412020108 课程：制造智能技术</a:t>
             </a:r>
             <a:endParaRPr lang="en-US" sz="1300" b="0" i="0" u="none" strike="noStrike">
               <a:solidFill>
@@ -16949,7 +16848,7 @@
                           <a:cs typeface="Noto Sans SC" panose="020B0200000000000000" charset="-122"/>
                           <a:sym typeface="Noto Sans SC" panose="020B0200000000000000" charset="-122"/>
                         </a:rPr>
-                        <a:t>                   与sk learn无缝集成</a:t>
+                        <a:t>                   与sklearn无缝集成</a:t>
                       </a:r>
                       <a:endParaRPr lang="en-US" sz="1100"/>
                     </a:p>
@@ -18176,50 +18075,13 @@
       </p:sp>
       <p:sp>
         <p:nvSpPr>
-          <p:cNvPr id="5" name="AutoShape 5"/>
-          <p:cNvSpPr/>
-          <p:nvPr/>
-        </p:nvSpPr>
-        <p:spPr>
-          <a:xfrm>
-            <a:off x="762000" y="1397000"/>
-            <a:ext cx="5080000" cy="2286000"/>
-          </a:xfrm>
-          <a:prstGeom prst="roundRect">
-            <a:avLst>
-              <a:gd name="adj" fmla="val 0"/>
-            </a:avLst>
-          </a:prstGeom>
-          <a:solidFill>
-            <a:srgbClr val="0D1B2A">
-              <a:alpha val="100000"/>
-            </a:srgbClr>
-          </a:solidFill>
-          <a:ln w="25400" cap="flat" cmpd="sng">
-            <a:noFill/>
-            <a:prstDash val="solid"/>
-            <a:round/>
-          </a:ln>
-        </p:spPr>
-        <p:txBody>
-          <a:bodyPr vert="horz" wrap="square" lIns="0" tIns="0" rIns="0" bIns="0" rtlCol="0" anchor="ctr" anchorCtr="0"/>
-          <a:lstStyle/>
-          <a:p>
-            <a:pPr algn="ctr">
-              <a:defRPr/>
-            </a:pPr>
-          </a:p>
-        </p:txBody>
-      </p:sp>
-      <p:sp>
-        <p:nvSpPr>
           <p:cNvPr id="6" name="AutoShape 6"/>
           <p:cNvSpPr/>
           <p:nvPr/>
         </p:nvSpPr>
         <p:spPr>
           <a:xfrm>
-            <a:off x="1016000" y="1587500"/>
+            <a:off x="762000" y="1397000"/>
             <a:ext cx="4572000" cy="304800"/>
           </a:xfrm>
           <a:prstGeom prst="rect">
@@ -18411,8 +18273,8 @@
         </p:nvSpPr>
         <p:spPr>
           <a:xfrm>
-            <a:off x="762000" y="3937000"/>
-            <a:ext cx="2286000" cy="1079500"/>
+            <a:off x="762000" y="4064635"/>
+            <a:ext cx="2286000" cy="951865"/>
           </a:xfrm>
           <a:prstGeom prst="roundRect">
             <a:avLst>
@@ -18452,7 +18314,7 @@
         </p:nvSpPr>
         <p:spPr>
           <a:xfrm>
-            <a:off x="889000" y="4064000"/>
+            <a:off x="889000" y="4108450"/>
             <a:ext cx="2032000" cy="635000"/>
           </a:xfrm>
           <a:prstGeom prst="rect">
@@ -18546,8 +18408,8 @@
         </p:nvSpPr>
         <p:spPr>
           <a:xfrm>
-            <a:off x="3556000" y="3937000"/>
-            <a:ext cx="2286000" cy="1079500"/>
+            <a:off x="3556000" y="4064635"/>
+            <a:ext cx="2286000" cy="951865"/>
           </a:xfrm>
           <a:prstGeom prst="roundRect">
             <a:avLst>
@@ -18587,7 +18449,7 @@
         </p:nvSpPr>
         <p:spPr>
           <a:xfrm>
-            <a:off x="3683000" y="4064000"/>
+            <a:off x="3683000" y="4108450"/>
             <a:ext cx="2032000" cy="635000"/>
           </a:xfrm>
           <a:prstGeom prst="rect">
@@ -19155,6 +19017,30 @@
           </a:p>
         </p:txBody>
       </p:sp>
+      <p:pic>
+        <p:nvPicPr>
+          <p:cNvPr id="20" name="图片 19"/>
+          <p:cNvPicPr>
+            <a:picLocks noChangeAspect="1"/>
+          </p:cNvPicPr>
+          <p:nvPr/>
+        </p:nvPicPr>
+        <p:blipFill>
+          <a:blip r:embed="rId1"/>
+          <a:stretch>
+            <a:fillRect/>
+          </a:stretch>
+        </p:blipFill>
+        <p:spPr>
+          <a:xfrm>
+            <a:off x="762000" y="1778000"/>
+            <a:ext cx="5079365" cy="2145665"/>
+          </a:xfrm>
+          <a:prstGeom prst="rect">
+            <a:avLst/>
+          </a:prstGeom>
+        </p:spPr>
+      </p:pic>
     </p:spTree>
   </p:cSld>
   <p:clrMapOvr>
@@ -19389,7 +19275,7 @@
                 <a:cs typeface="Noto Serif SC" panose="02020200000000000000" charset="-122"/>
                 <a:sym typeface="Noto Serif SC" panose="02020200000000000000" charset="-122"/>
               </a:rPr>
-              <a:t>62.2%</a:t>
+              <a:t>72.2%</a:t>
             </a:r>
             <a:endParaRPr lang="en-US" sz="1100"/>
           </a:p>
@@ -19526,7 +19412,7 @@
                 <a:cs typeface="Noto Serif SC" panose="02020200000000000000" charset="-122"/>
                 <a:sym typeface="Noto Serif SC" panose="02020200000000000000" charset="-122"/>
               </a:rPr>
-              <a:t>65.9%</a:t>
+              <a:t>75.9%</a:t>
             </a:r>
             <a:endParaRPr lang="en-US" sz="1100"/>
           </a:p>
@@ -19661,7 +19547,7 @@
                 <a:cs typeface="Noto Serif SC" panose="02020200000000000000" charset="-122"/>
                 <a:sym typeface="Noto Serif SC" panose="02020200000000000000" charset="-122"/>
               </a:rPr>
-              <a:t>60.4%</a:t>
+              <a:t>70.4%</a:t>
             </a:r>
             <a:endParaRPr lang="en-US" sz="1100"/>
           </a:p>
@@ -19796,7 +19682,7 @@
                 <a:cs typeface="Noto Serif SC" panose="02020200000000000000" charset="-122"/>
                 <a:sym typeface="Noto Serif SC" panose="02020200000000000000" charset="-122"/>
               </a:rPr>
-              <a:t>63.0%</a:t>
+              <a:t>73.0%</a:t>
             </a:r>
             <a:endParaRPr lang="en-US" sz="1100"/>
           </a:p>
@@ -21037,8 +20923,8 @@
         </p:nvSpPr>
         <p:spPr>
           <a:xfrm>
-            <a:off x="3810000" y="3810000"/>
-            <a:ext cx="7620000" cy="762000"/>
+            <a:off x="3810000" y="3835400"/>
+            <a:ext cx="7620000" cy="1758315"/>
           </a:xfrm>
           <a:prstGeom prst="roundRect">
             <a:avLst>
@@ -21074,7 +20960,7 @@
         </p:nvSpPr>
         <p:spPr>
           <a:xfrm>
-            <a:off x="4064000" y="3937000"/>
+            <a:off x="4064000" y="4254500"/>
             <a:ext cx="7112000" cy="571500"/>
           </a:xfrm>
           <a:prstGeom prst="rect">
@@ -21098,7 +20984,7 @@
               <a:defRPr/>
             </a:pPr>
             <a:r>
-              <a:rPr lang="en-US" sz="1100" b="0" i="0" u="none" strike="noStrike">
+              <a:rPr lang="en-US" sz="2000" b="0" i="0" u="none" strike="noStrike">
                 <a:solidFill>
                   <a:srgbClr val="465667"/>
                 </a:solidFill>
@@ -21109,7 +20995,7 @@
               </a:rPr>
               <a:t>召回率高于精确率，模型更倾向于识别缺陷样本，符合质量控制场景"宁可误报不可漏检"的需求。</a:t>
             </a:r>
-            <a:endParaRPr lang="en-US" sz="1100"/>
+            <a:endParaRPr lang="en-US" sz="2000"/>
           </a:p>
           <a:p>
             <a:pPr marL="0" indent="0" algn="l">
@@ -21118,7 +21004,7 @@
               </a:lnSpc>
             </a:pPr>
             <a:r>
-              <a:rPr lang="en-US" sz="1100" b="0" i="0" u="none" strike="noStrike">
+              <a:rPr lang="en-US" sz="2000" b="0" i="0" u="none" strike="noStrike">
                 <a:solidFill>
                   <a:srgbClr val="465667"/>
                 </a:solidFill>
@@ -21129,7 +21015,7 @@
               </a:rPr>
               <a:t>各参数重要性分布均匀，说明焊接缺陷是多因素耦合的结果。</a:t>
             </a:r>
-            <a:endParaRPr lang="en-US" sz="1100" b="0" i="0" u="none" strike="noStrike">
+            <a:endParaRPr lang="en-US" sz="2000" b="0" i="0" u="none" strike="noStrike">
               <a:solidFill>
                 <a:srgbClr val="465667"/>
               </a:solidFill>
@@ -21350,7 +21236,11 @@
         <p:nvSpPr>
           <p:cNvPr id="5" name="AutoShape 5"/>
           <p:cNvSpPr/>
-          <p:nvPr/>
+          <p:nvPr>
+            <p:custDataLst>
+              <p:tags r:id="rId1"/>
+            </p:custDataLst>
+          </p:nvPr>
         </p:nvSpPr>
         <p:spPr>
           <a:xfrm>
@@ -21391,7 +21281,11 @@
         <p:nvSpPr>
           <p:cNvPr id="6" name="AutoShape 6"/>
           <p:cNvSpPr/>
-          <p:nvPr/>
+          <p:nvPr>
+            <p:custDataLst>
+              <p:tags r:id="rId2"/>
+            </p:custDataLst>
+          </p:nvPr>
         </p:nvSpPr>
         <p:spPr>
           <a:xfrm>
@@ -21444,7 +21338,11 @@
         <p:nvSpPr>
           <p:cNvPr id="7" name="AutoShape 7"/>
           <p:cNvSpPr/>
-          <p:nvPr/>
+          <p:nvPr>
+            <p:custDataLst>
+              <p:tags r:id="rId3"/>
+            </p:custDataLst>
+          </p:nvPr>
         </p:nvSpPr>
         <p:spPr>
           <a:xfrm>
@@ -21491,7 +21389,11 @@
         <p:nvSpPr>
           <p:cNvPr id="8" name="AutoShape 8"/>
           <p:cNvSpPr/>
-          <p:nvPr/>
+          <p:nvPr>
+            <p:custDataLst>
+              <p:tags r:id="rId4"/>
+            </p:custDataLst>
+          </p:nvPr>
         </p:nvSpPr>
         <p:spPr>
           <a:xfrm>
@@ -21594,7 +21496,11 @@
         <p:nvSpPr>
           <p:cNvPr id="9" name="AutoShape 9"/>
           <p:cNvSpPr/>
-          <p:nvPr/>
+          <p:nvPr>
+            <p:custDataLst>
+              <p:tags r:id="rId5"/>
+            </p:custDataLst>
+          </p:nvPr>
         </p:nvSpPr>
         <p:spPr>
           <a:xfrm>
@@ -21635,7 +21541,11 @@
         <p:nvSpPr>
           <p:cNvPr id="10" name="AutoShape 10"/>
           <p:cNvSpPr/>
-          <p:nvPr/>
+          <p:nvPr>
+            <p:custDataLst>
+              <p:tags r:id="rId6"/>
+            </p:custDataLst>
+          </p:nvPr>
         </p:nvSpPr>
         <p:spPr>
           <a:xfrm>
@@ -21688,7 +21598,11 @@
         <p:nvSpPr>
           <p:cNvPr id="11" name="AutoShape 11"/>
           <p:cNvSpPr/>
-          <p:nvPr/>
+          <p:nvPr>
+            <p:custDataLst>
+              <p:tags r:id="rId7"/>
+            </p:custDataLst>
+          </p:nvPr>
         </p:nvSpPr>
         <p:spPr>
           <a:xfrm>
@@ -21735,7 +21649,11 @@
         <p:nvSpPr>
           <p:cNvPr id="12" name="AutoShape 12"/>
           <p:cNvSpPr/>
-          <p:nvPr/>
+          <p:nvPr>
+            <p:custDataLst>
+              <p:tags r:id="rId8"/>
+            </p:custDataLst>
+          </p:nvPr>
         </p:nvSpPr>
         <p:spPr>
           <a:xfrm>
@@ -21838,7 +21756,11 @@
         <p:nvSpPr>
           <p:cNvPr id="13" name="AutoShape 13"/>
           <p:cNvSpPr/>
-          <p:nvPr/>
+          <p:nvPr>
+            <p:custDataLst>
+              <p:tags r:id="rId9"/>
+            </p:custDataLst>
+          </p:nvPr>
         </p:nvSpPr>
         <p:spPr>
           <a:xfrm>
@@ -21879,7 +21801,11 @@
         <p:nvSpPr>
           <p:cNvPr id="14" name="AutoShape 14"/>
           <p:cNvSpPr/>
-          <p:nvPr/>
+          <p:nvPr>
+            <p:custDataLst>
+              <p:tags r:id="rId10"/>
+            </p:custDataLst>
+          </p:nvPr>
         </p:nvSpPr>
         <p:spPr>
           <a:xfrm>
@@ -21932,7 +21858,11 @@
         <p:nvSpPr>
           <p:cNvPr id="15" name="AutoShape 15"/>
           <p:cNvSpPr/>
-          <p:nvPr/>
+          <p:nvPr>
+            <p:custDataLst>
+              <p:tags r:id="rId11"/>
+            </p:custDataLst>
+          </p:nvPr>
         </p:nvSpPr>
         <p:spPr>
           <a:xfrm>
@@ -21979,7 +21909,11 @@
         <p:nvSpPr>
           <p:cNvPr id="16" name="AutoShape 16"/>
           <p:cNvSpPr/>
-          <p:nvPr/>
+          <p:nvPr>
+            <p:custDataLst>
+              <p:tags r:id="rId12"/>
+            </p:custDataLst>
+          </p:nvPr>
         </p:nvSpPr>
         <p:spPr>
           <a:xfrm>
@@ -22082,7 +22016,11 @@
         <p:nvSpPr>
           <p:cNvPr id="17" name="AutoShape 17"/>
           <p:cNvSpPr/>
-          <p:nvPr/>
+          <p:nvPr>
+            <p:custDataLst>
+              <p:tags r:id="rId13"/>
+            </p:custDataLst>
+          </p:nvPr>
         </p:nvSpPr>
         <p:spPr>
           <a:xfrm>
@@ -22119,7 +22057,11 @@
         <p:nvSpPr>
           <p:cNvPr id="18" name="AutoShape 18"/>
           <p:cNvSpPr/>
-          <p:nvPr/>
+          <p:nvPr>
+            <p:custDataLst>
+              <p:tags r:id="rId14"/>
+            </p:custDataLst>
+          </p:nvPr>
         </p:nvSpPr>
         <p:spPr>
           <a:xfrm>
@@ -22172,7 +22114,11 @@
         <p:nvSpPr>
           <p:cNvPr id="19" name="AutoShape 19"/>
           <p:cNvSpPr/>
-          <p:nvPr/>
+          <p:nvPr>
+            <p:custDataLst>
+              <p:tags r:id="rId15"/>
+            </p:custDataLst>
+          </p:nvPr>
         </p:nvSpPr>
         <p:spPr>
           <a:xfrm>
@@ -22219,7 +22165,11 @@
         <p:nvSpPr>
           <p:cNvPr id="20" name="AutoShape 20"/>
           <p:cNvSpPr/>
-          <p:nvPr/>
+          <p:nvPr>
+            <p:custDataLst>
+              <p:tags r:id="rId16"/>
+            </p:custDataLst>
+          </p:nvPr>
         </p:nvSpPr>
         <p:spPr>
           <a:xfrm>
@@ -22367,626 +22317,6 @@
       </p:sp>
       <p:sp>
         <p:nvSpPr>
-          <p:cNvPr id="22" name="AutoShape 22"/>
-          <p:cNvSpPr/>
-          <p:nvPr/>
-        </p:nvSpPr>
-        <p:spPr>
-          <a:xfrm>
-            <a:off x="762000" y="3810000"/>
-            <a:ext cx="2540000" cy="304800"/>
-          </a:xfrm>
-          <a:prstGeom prst="rect">
-            <a:avLst/>
-          </a:prstGeom>
-          <a:noFill/>
-          <a:ln w="12700" cap="flat" cmpd="sng">
-            <a:noFill/>
-            <a:prstDash val="solid"/>
-            <a:round/>
-          </a:ln>
-        </p:spPr>
-        <p:txBody>
-          <a:bodyPr vert="horz" wrap="square" lIns="0" tIns="0" rIns="0" bIns="0" rtlCol="0" anchor="ctr" anchorCtr="0"/>
-          <a:lstStyle/>
-          <a:p>
-            <a:pPr marL="0" indent="0" algn="l">
-              <a:lnSpc>
-                <a:spcPct val="125000"/>
-              </a:lnSpc>
-              <a:defRPr/>
-            </a:pPr>
-            <a:r>
-              <a:rPr lang="en-US" sz="1400" b="1" i="0" u="none" strike="noStrike">
-                <a:solidFill>
-                  <a:srgbClr val="0D1B2A"/>
-                </a:solidFill>
-                <a:latin typeface="Noto Serif SC" panose="02020200000000000000" charset="-122"/>
-                <a:ea typeface="Noto Serif SC" panose="02020200000000000000" charset="-122"/>
-                <a:cs typeface="Noto Serif SC" panose="02020200000000000000" charset="-122"/>
-                <a:sym typeface="Noto Serif SC" panose="02020200000000000000" charset="-122"/>
-              </a:rPr>
-              <a:t>技术实现要点</a:t>
-            </a:r>
-            <a:endParaRPr lang="en-US" sz="1100"/>
-          </a:p>
-        </p:txBody>
-      </p:sp>
-      <p:sp>
-        <p:nvSpPr>
-          <p:cNvPr id="23" name="AutoShape 23"/>
-          <p:cNvSpPr/>
-          <p:nvPr/>
-        </p:nvSpPr>
-        <p:spPr>
-          <a:xfrm>
-            <a:off x="762000" y="4254500"/>
-            <a:ext cx="3302000" cy="1524000"/>
-          </a:xfrm>
-          <a:prstGeom prst="roundRect">
-            <a:avLst>
-              <a:gd name="adj" fmla="val 0"/>
-            </a:avLst>
-          </a:prstGeom>
-          <a:solidFill>
-            <a:srgbClr val="FFFFFF">
-              <a:alpha val="100000"/>
-            </a:srgbClr>
-          </a:solidFill>
-          <a:ln w="12700" cap="flat" cmpd="sng">
-            <a:solidFill>
-              <a:srgbClr val="DCDCDC">
-                <a:alpha val="100000"/>
-              </a:srgbClr>
-            </a:solidFill>
-            <a:prstDash val="solid"/>
-            <a:round/>
-          </a:ln>
-        </p:spPr>
-        <p:txBody>
-          <a:bodyPr vert="horz" wrap="square" lIns="0" tIns="0" rIns="0" bIns="0" rtlCol="0" anchor="ctr" anchorCtr="0"/>
-          <a:lstStyle/>
-          <a:p>
-            <a:pPr algn="ctr">
-              <a:defRPr/>
-            </a:pPr>
-          </a:p>
-        </p:txBody>
-      </p:sp>
-      <p:sp>
-        <p:nvSpPr>
-          <p:cNvPr id="24" name="AutoShape 24"/>
-          <p:cNvSpPr/>
-          <p:nvPr/>
-        </p:nvSpPr>
-        <p:spPr>
-          <a:xfrm>
-            <a:off x="952500" y="4406900"/>
-            <a:ext cx="2921000" cy="254000"/>
-          </a:xfrm>
-          <a:prstGeom prst="rect">
-            <a:avLst/>
-          </a:prstGeom>
-          <a:noFill/>
-          <a:ln w="12700" cap="flat" cmpd="sng">
-            <a:noFill/>
-            <a:prstDash val="solid"/>
-            <a:round/>
-          </a:ln>
-        </p:spPr>
-        <p:txBody>
-          <a:bodyPr vert="horz" wrap="square" lIns="0" tIns="0" rIns="0" bIns="0" rtlCol="0" anchor="ctr" anchorCtr="0"/>
-          <a:lstStyle/>
-          <a:p>
-            <a:pPr marL="0" indent="0" algn="l">
-              <a:lnSpc>
-                <a:spcPct val="125000"/>
-              </a:lnSpc>
-              <a:defRPr/>
-            </a:pPr>
-            <a:r>
-              <a:rPr lang="en-US" sz="1200" b="1" i="0" u="none" strike="noStrike">
-                <a:solidFill>
-                  <a:srgbClr val="0D1B2A"/>
-                </a:solidFill>
-                <a:latin typeface="Noto Serif SC" panose="02020200000000000000" charset="-122"/>
-                <a:ea typeface="Noto Serif SC" panose="02020200000000000000" charset="-122"/>
-                <a:cs typeface="Noto Serif SC" panose="02020200000000000000" charset="-122"/>
-                <a:sym typeface="Noto Serif SC" panose="02020200000000000000" charset="-122"/>
-              </a:rPr>
-              <a:t>后端：Flask + 9个API接口</a:t>
-            </a:r>
-            <a:endParaRPr lang="en-US" sz="1100"/>
-          </a:p>
-        </p:txBody>
-      </p:sp>
-      <p:sp>
-        <p:nvSpPr>
-          <p:cNvPr id="25" name="AutoShape 25"/>
-          <p:cNvSpPr/>
-          <p:nvPr/>
-        </p:nvSpPr>
-        <p:spPr>
-          <a:xfrm>
-            <a:off x="952500" y="4724400"/>
-            <a:ext cx="2921000" cy="889000"/>
-          </a:xfrm>
-          <a:prstGeom prst="rect">
-            <a:avLst/>
-          </a:prstGeom>
-          <a:noFill/>
-          <a:ln w="12700" cap="flat" cmpd="sng">
-            <a:noFill/>
-            <a:prstDash val="solid"/>
-            <a:round/>
-          </a:ln>
-        </p:spPr>
-        <p:txBody>
-          <a:bodyPr vert="horz" wrap="square" lIns="0" tIns="0" rIns="0" bIns="0" rtlCol="0" anchor="ctr" anchorCtr="0"/>
-          <a:lstStyle/>
-          <a:p>
-            <a:pPr marL="0" indent="0" algn="l">
-              <a:lnSpc>
-                <a:spcPct val="125000"/>
-              </a:lnSpc>
-              <a:defRPr/>
-            </a:pPr>
-            <a:r>
-              <a:rPr lang="en-US" sz="1000" b="0" i="0" u="none" strike="noStrike">
-                <a:solidFill>
-                  <a:srgbClr val="465667"/>
-                </a:solidFill>
-                <a:latin typeface="Noto Serif SC" panose="02020200000000000000" charset="-122"/>
-                <a:ea typeface="Noto Serif SC" panose="02020200000000000000" charset="-122"/>
-                <a:cs typeface="Noto Serif SC" panose="02020200000000000000" charset="-122"/>
-                <a:sym typeface="Noto Serif SC" panose="02020200000000000000" charset="-122"/>
-              </a:rPr>
-              <a:t>预测、优化、批量、历史、统计</a:t>
-            </a:r>
-            <a:endParaRPr lang="en-US" sz="1100"/>
-          </a:p>
-          <a:p>
-            <a:pPr marL="0" indent="0" algn="l">
-              <a:lnSpc>
-                <a:spcPct val="125000"/>
-              </a:lnSpc>
-            </a:pPr>
-            <a:r>
-              <a:rPr lang="en-US" sz="1000" b="0" i="0" u="none" strike="noStrike">
-                <a:solidFill>
-                  <a:srgbClr val="465667"/>
-                </a:solidFill>
-                <a:latin typeface="Noto Serif SC" panose="02020200000000000000" charset="-122"/>
-                <a:ea typeface="Noto Serif SC" panose="02020200000000000000" charset="-122"/>
-                <a:cs typeface="Noto Serif SC" panose="02020200000000000000" charset="-122"/>
-                <a:sym typeface="Noto Serif SC" panose="02020200000000000000" charset="-122"/>
-              </a:rPr>
-              <a:t>特征重要性、智能建议、导出</a:t>
-            </a:r>
-            <a:endParaRPr lang="en-US" sz="1000" b="0" i="0" u="none" strike="noStrike">
-              <a:solidFill>
-                <a:srgbClr val="465667"/>
-              </a:solidFill>
-              <a:latin typeface="Noto Serif SC" panose="02020200000000000000" charset="-122"/>
-              <a:ea typeface="Noto Serif SC" panose="02020200000000000000" charset="-122"/>
-              <a:cs typeface="Noto Serif SC" panose="02020200000000000000" charset="-122"/>
-              <a:sym typeface="Noto Serif SC" panose="02020200000000000000" charset="-122"/>
-            </a:endParaRPr>
-          </a:p>
-          <a:p>
-            <a:pPr marL="0" indent="0" algn="l">
-              <a:lnSpc>
-                <a:spcPct val="125000"/>
-              </a:lnSpc>
-            </a:pPr>
-            <a:r>
-              <a:rPr lang="en-US" sz="1000" b="0" i="0" u="none" strike="noStrike">
-                <a:solidFill>
-                  <a:srgbClr val="465667"/>
-                </a:solidFill>
-                <a:latin typeface="Noto Serif SC" panose="02020200000000000000" charset="-122"/>
-                <a:ea typeface="Noto Serif SC" panose="02020200000000000000" charset="-122"/>
-                <a:cs typeface="Noto Serif SC" panose="02020200000000000000" charset="-122"/>
-                <a:sym typeface="Noto Serif SC" panose="02020200000000000000" charset="-122"/>
-              </a:rPr>
-              <a:t>健康检查、清空记录</a:t>
-            </a:r>
-            <a:endParaRPr lang="en-US" sz="1000" b="0" i="0" u="none" strike="noStrike">
-              <a:solidFill>
-                <a:srgbClr val="465667"/>
-              </a:solidFill>
-              <a:latin typeface="Noto Serif SC" panose="02020200000000000000" charset="-122"/>
-              <a:ea typeface="Noto Serif SC" panose="02020200000000000000" charset="-122"/>
-              <a:cs typeface="Noto Serif SC" panose="02020200000000000000" charset="-122"/>
-              <a:sym typeface="Noto Serif SC" panose="02020200000000000000" charset="-122"/>
-            </a:endParaRPr>
-          </a:p>
-        </p:txBody>
-      </p:sp>
-      <p:sp>
-        <p:nvSpPr>
-          <p:cNvPr id="26" name="AutoShape 26"/>
-          <p:cNvSpPr/>
-          <p:nvPr/>
-        </p:nvSpPr>
-        <p:spPr>
-          <a:xfrm>
-            <a:off x="4445000" y="4254500"/>
-            <a:ext cx="3302000" cy="1524000"/>
-          </a:xfrm>
-          <a:prstGeom prst="roundRect">
-            <a:avLst>
-              <a:gd name="adj" fmla="val 0"/>
-            </a:avLst>
-          </a:prstGeom>
-          <a:solidFill>
-            <a:srgbClr val="FFFFFF">
-              <a:alpha val="100000"/>
-            </a:srgbClr>
-          </a:solidFill>
-          <a:ln w="12700" cap="flat" cmpd="sng">
-            <a:solidFill>
-              <a:srgbClr val="DCDCDC">
-                <a:alpha val="100000"/>
-              </a:srgbClr>
-            </a:solidFill>
-            <a:prstDash val="solid"/>
-            <a:round/>
-          </a:ln>
-        </p:spPr>
-        <p:txBody>
-          <a:bodyPr vert="horz" wrap="square" lIns="0" tIns="0" rIns="0" bIns="0" rtlCol="0" anchor="ctr" anchorCtr="0"/>
-          <a:lstStyle/>
-          <a:p>
-            <a:pPr algn="ctr">
-              <a:defRPr/>
-            </a:pPr>
-          </a:p>
-        </p:txBody>
-      </p:sp>
-      <p:sp>
-        <p:nvSpPr>
-          <p:cNvPr id="27" name="AutoShape 27"/>
-          <p:cNvSpPr/>
-          <p:nvPr/>
-        </p:nvSpPr>
-        <p:spPr>
-          <a:xfrm>
-            <a:off x="4635500" y="4406900"/>
-            <a:ext cx="2921000" cy="254000"/>
-          </a:xfrm>
-          <a:prstGeom prst="rect">
-            <a:avLst/>
-          </a:prstGeom>
-          <a:noFill/>
-          <a:ln w="12700" cap="flat" cmpd="sng">
-            <a:noFill/>
-            <a:prstDash val="solid"/>
-            <a:round/>
-          </a:ln>
-        </p:spPr>
-        <p:txBody>
-          <a:bodyPr vert="horz" wrap="square" lIns="0" tIns="0" rIns="0" bIns="0" rtlCol="0" anchor="ctr" anchorCtr="0"/>
-          <a:lstStyle/>
-          <a:p>
-            <a:pPr marL="0" indent="0" algn="l">
-              <a:lnSpc>
-                <a:spcPct val="125000"/>
-              </a:lnSpc>
-              <a:defRPr/>
-            </a:pPr>
-            <a:r>
-              <a:rPr lang="en-US" sz="1200" b="1" i="0" u="none" strike="noStrike">
-                <a:solidFill>
-                  <a:srgbClr val="0D1B2A"/>
-                </a:solidFill>
-                <a:latin typeface="Noto Serif SC" panose="02020200000000000000" charset="-122"/>
-                <a:ea typeface="Noto Serif SC" panose="02020200000000000000" charset="-122"/>
-                <a:cs typeface="Noto Serif SC" panose="02020200000000000000" charset="-122"/>
-                <a:sym typeface="Noto Serif SC" panose="02020200000000000000" charset="-122"/>
-              </a:rPr>
-              <a:t>前端：三分区Tab布局</a:t>
-            </a:r>
-            <a:endParaRPr lang="en-US" sz="1100"/>
-          </a:p>
-        </p:txBody>
-      </p:sp>
-      <p:sp>
-        <p:nvSpPr>
-          <p:cNvPr id="28" name="AutoShape 28"/>
-          <p:cNvSpPr/>
-          <p:nvPr/>
-        </p:nvSpPr>
-        <p:spPr>
-          <a:xfrm>
-            <a:off x="4635500" y="4724400"/>
-            <a:ext cx="2921000" cy="889000"/>
-          </a:xfrm>
-          <a:prstGeom prst="rect">
-            <a:avLst/>
-          </a:prstGeom>
-          <a:noFill/>
-          <a:ln w="12700" cap="flat" cmpd="sng">
-            <a:noFill/>
-            <a:prstDash val="solid"/>
-            <a:round/>
-          </a:ln>
-        </p:spPr>
-        <p:txBody>
-          <a:bodyPr vert="horz" wrap="square" lIns="0" tIns="0" rIns="0" bIns="0" rtlCol="0" anchor="ctr" anchorCtr="0"/>
-          <a:lstStyle/>
-          <a:p>
-            <a:pPr marL="0" indent="0" algn="l">
-              <a:lnSpc>
-                <a:spcPct val="125000"/>
-              </a:lnSpc>
-              <a:defRPr/>
-            </a:pPr>
-            <a:r>
-              <a:rPr lang="en-US" sz="1000" b="0" i="0" u="none" strike="noStrike">
-                <a:solidFill>
-                  <a:srgbClr val="465667"/>
-                </a:solidFill>
-                <a:latin typeface="Noto Serif SC" panose="02020200000000000000" charset="-122"/>
-                <a:ea typeface="Noto Serif SC" panose="02020200000000000000" charset="-122"/>
-                <a:cs typeface="Noto Serif SC" panose="02020200000000000000" charset="-122"/>
-                <a:sym typeface="Noto Serif SC" panose="02020200000000000000" charset="-122"/>
-              </a:rPr>
-              <a:t>缺陷预测 / 数据分析 / 历史记录</a:t>
-            </a:r>
-            <a:endParaRPr lang="en-US" sz="1100"/>
-          </a:p>
-          <a:p>
-            <a:pPr marL="0" indent="0" algn="l">
-              <a:lnSpc>
-                <a:spcPct val="125000"/>
-              </a:lnSpc>
-            </a:pPr>
-            <a:r>
-              <a:rPr lang="en-US" sz="1000" b="0" i="0" u="none" strike="noStrike">
-                <a:solidFill>
-                  <a:srgbClr val="465667"/>
-                </a:solidFill>
-                <a:latin typeface="Noto Serif SC" panose="02020200000000000000" charset="-122"/>
-                <a:ea typeface="Noto Serif SC" panose="02020200000000000000" charset="-122"/>
-                <a:cs typeface="Noto Serif SC" panose="02020200000000000000" charset="-122"/>
-                <a:sym typeface="Noto Serif SC" panose="02020200000000000000" charset="-122"/>
-              </a:rPr>
-              <a:t>ECharts可视化，实时参数校验</a:t>
-            </a:r>
-            <a:endParaRPr lang="en-US" sz="1000" b="0" i="0" u="none" strike="noStrike">
-              <a:solidFill>
-                <a:srgbClr val="465667"/>
-              </a:solidFill>
-              <a:latin typeface="Noto Serif SC" panose="02020200000000000000" charset="-122"/>
-              <a:ea typeface="Noto Serif SC" panose="02020200000000000000" charset="-122"/>
-              <a:cs typeface="Noto Serif SC" panose="02020200000000000000" charset="-122"/>
-              <a:sym typeface="Noto Serif SC" panose="02020200000000000000" charset="-122"/>
-            </a:endParaRPr>
-          </a:p>
-          <a:p>
-            <a:pPr marL="0" indent="0" algn="l">
-              <a:lnSpc>
-                <a:spcPct val="125000"/>
-              </a:lnSpc>
-            </a:pPr>
-            <a:r>
-              <a:rPr lang="en-US" sz="1000" b="0" i="0" u="none" strike="noStrike">
-                <a:solidFill>
-                  <a:srgbClr val="465667"/>
-                </a:solidFill>
-                <a:latin typeface="Noto Serif SC" panose="02020200000000000000" charset="-122"/>
-                <a:ea typeface="Noto Serif SC" panose="02020200000000000000" charset="-122"/>
-                <a:cs typeface="Noto Serif SC" panose="02020200000000000000" charset="-122"/>
-                <a:sym typeface="Noto Serif SC" panose="02020200000000000000" charset="-122"/>
-              </a:rPr>
-              <a:t>深蓝+琥珀金工业风设计</a:t>
-            </a:r>
-            <a:endParaRPr lang="en-US" sz="1000" b="0" i="0" u="none" strike="noStrike">
-              <a:solidFill>
-                <a:srgbClr val="465667"/>
-              </a:solidFill>
-              <a:latin typeface="Noto Serif SC" panose="02020200000000000000" charset="-122"/>
-              <a:ea typeface="Noto Serif SC" panose="02020200000000000000" charset="-122"/>
-              <a:cs typeface="Noto Serif SC" panose="02020200000000000000" charset="-122"/>
-              <a:sym typeface="Noto Serif SC" panose="02020200000000000000" charset="-122"/>
-            </a:endParaRPr>
-          </a:p>
-        </p:txBody>
-      </p:sp>
-      <p:sp>
-        <p:nvSpPr>
-          <p:cNvPr id="29" name="AutoShape 29"/>
-          <p:cNvSpPr/>
-          <p:nvPr/>
-        </p:nvSpPr>
-        <p:spPr>
-          <a:xfrm>
-            <a:off x="8128000" y="4254500"/>
-            <a:ext cx="3302000" cy="1524000"/>
-          </a:xfrm>
-          <a:prstGeom prst="roundRect">
-            <a:avLst>
-              <a:gd name="adj" fmla="val 0"/>
-            </a:avLst>
-          </a:prstGeom>
-          <a:solidFill>
-            <a:srgbClr val="FFFFFF">
-              <a:alpha val="100000"/>
-            </a:srgbClr>
-          </a:solidFill>
-          <a:ln w="12700" cap="flat" cmpd="sng">
-            <a:solidFill>
-              <a:srgbClr val="DCDCDC">
-                <a:alpha val="100000"/>
-              </a:srgbClr>
-            </a:solidFill>
-            <a:prstDash val="solid"/>
-            <a:round/>
-          </a:ln>
-        </p:spPr>
-        <p:txBody>
-          <a:bodyPr vert="horz" wrap="square" lIns="0" tIns="0" rIns="0" bIns="0" rtlCol="0" anchor="ctr" anchorCtr="0"/>
-          <a:lstStyle/>
-          <a:p>
-            <a:pPr algn="ctr">
-              <a:defRPr/>
-            </a:pPr>
-          </a:p>
-        </p:txBody>
-      </p:sp>
-      <p:sp>
-        <p:nvSpPr>
-          <p:cNvPr id="30" name="AutoShape 30"/>
-          <p:cNvSpPr/>
-          <p:nvPr/>
-        </p:nvSpPr>
-        <p:spPr>
-          <a:xfrm>
-            <a:off x="8318500" y="4406900"/>
-            <a:ext cx="2921000" cy="254000"/>
-          </a:xfrm>
-          <a:prstGeom prst="rect">
-            <a:avLst/>
-          </a:prstGeom>
-          <a:noFill/>
-          <a:ln w="12700" cap="flat" cmpd="sng">
-            <a:noFill/>
-            <a:prstDash val="solid"/>
-            <a:round/>
-          </a:ln>
-        </p:spPr>
-        <p:txBody>
-          <a:bodyPr vert="horz" wrap="square" lIns="0" tIns="0" rIns="0" bIns="0" rtlCol="0" anchor="ctr" anchorCtr="0"/>
-          <a:lstStyle/>
-          <a:p>
-            <a:pPr marL="0" indent="0" algn="l">
-              <a:lnSpc>
-                <a:spcPct val="125000"/>
-              </a:lnSpc>
-              <a:defRPr/>
-            </a:pPr>
-            <a:r>
-              <a:rPr lang="en-US" sz="1200" b="1" i="0" u="none" strike="noStrike">
-                <a:solidFill>
-                  <a:srgbClr val="0D1B2A"/>
-                </a:solidFill>
-                <a:latin typeface="Noto Serif SC" panose="02020200000000000000" charset="-122"/>
-                <a:ea typeface="Noto Serif SC" panose="02020200000000000000" charset="-122"/>
-                <a:cs typeface="Noto Serif SC" panose="02020200000000000000" charset="-122"/>
-                <a:sym typeface="Noto Serif SC" panose="02020200000000000000" charset="-122"/>
-              </a:rPr>
-              <a:t>数据层：SQLite持久化</a:t>
-            </a:r>
-            <a:endParaRPr lang="en-US" sz="1100"/>
-          </a:p>
-        </p:txBody>
-      </p:sp>
-      <p:sp>
-        <p:nvSpPr>
-          <p:cNvPr id="31" name="AutoShape 31"/>
-          <p:cNvSpPr/>
-          <p:nvPr/>
-        </p:nvSpPr>
-        <p:spPr>
-          <a:xfrm>
-            <a:off x="8318500" y="4724400"/>
-            <a:ext cx="2921000" cy="889000"/>
-          </a:xfrm>
-          <a:prstGeom prst="rect">
-            <a:avLst/>
-          </a:prstGeom>
-          <a:noFill/>
-          <a:ln w="12700" cap="flat" cmpd="sng">
-            <a:noFill/>
-            <a:prstDash val="solid"/>
-            <a:round/>
-          </a:ln>
-        </p:spPr>
-        <p:txBody>
-          <a:bodyPr vert="horz" wrap="square" lIns="0" tIns="0" rIns="0" bIns="0" rtlCol="0" anchor="ctr" anchorCtr="0"/>
-          <a:lstStyle/>
-          <a:p>
-            <a:pPr marL="0" indent="0" algn="l">
-              <a:lnSpc>
-                <a:spcPct val="125000"/>
-              </a:lnSpc>
-              <a:defRPr/>
-            </a:pPr>
-            <a:r>
-              <a:rPr lang="en-US" sz="1000" b="0" i="0" u="none" strike="noStrike">
-                <a:solidFill>
-                  <a:srgbClr val="465667"/>
-                </a:solidFill>
-                <a:latin typeface="Noto Serif SC" panose="02020200000000000000" charset="-122"/>
-                <a:ea typeface="Noto Serif SC" panose="02020200000000000000" charset="-122"/>
-                <a:cs typeface="Noto Serif SC" panose="02020200000000000000" charset="-122"/>
-                <a:sym typeface="Noto Serif SC" panose="02020200000000000000" charset="-122"/>
-              </a:rPr>
-              <a:t>预测记录自动入库，批次标识</a:t>
-            </a:r>
-            <a:endParaRPr lang="en-US" sz="1100"/>
-          </a:p>
-          <a:p>
-            <a:pPr marL="0" indent="0" algn="l">
-              <a:lnSpc>
-                <a:spcPct val="125000"/>
-              </a:lnSpc>
-            </a:pPr>
-            <a:r>
-              <a:rPr lang="en-US" sz="1000" b="0" i="0" u="none" strike="noStrike">
-                <a:solidFill>
-                  <a:srgbClr val="465667"/>
-                </a:solidFill>
-                <a:latin typeface="Noto Serif SC" panose="02020200000000000000" charset="-122"/>
-                <a:ea typeface="Noto Serif SC" panose="02020200000000000000" charset="-122"/>
-                <a:cs typeface="Noto Serif SC" panose="02020200000000000000" charset="-122"/>
-                <a:sym typeface="Noto Serif SC" panose="02020200000000000000" charset="-122"/>
-              </a:rPr>
-              <a:t>模型文件+标准化器本地加载</a:t>
-            </a:r>
-            <a:endParaRPr lang="en-US" sz="1000" b="0" i="0" u="none" strike="noStrike">
-              <a:solidFill>
-                <a:srgbClr val="465667"/>
-              </a:solidFill>
-              <a:latin typeface="Noto Serif SC" panose="02020200000000000000" charset="-122"/>
-              <a:ea typeface="Noto Serif SC" panose="02020200000000000000" charset="-122"/>
-              <a:cs typeface="Noto Serif SC" panose="02020200000000000000" charset="-122"/>
-              <a:sym typeface="Noto Serif SC" panose="02020200000000000000" charset="-122"/>
-            </a:endParaRPr>
-          </a:p>
-          <a:p>
-            <a:pPr marL="0" indent="0" algn="l">
-              <a:lnSpc>
-                <a:spcPct val="125000"/>
-              </a:lnSpc>
-            </a:pPr>
-            <a:r>
-              <a:rPr lang="en-US" sz="1000" b="0" i="0" u="none" strike="noStrike">
-                <a:solidFill>
-                  <a:srgbClr val="465667"/>
-                </a:solidFill>
-                <a:latin typeface="Noto Serif SC" panose="02020200000000000000" charset="-122"/>
-                <a:ea typeface="Noto Serif SC" panose="02020200000000000000" charset="-122"/>
-                <a:cs typeface="Noto Serif SC" panose="02020200000000000000" charset="-122"/>
-                <a:sym typeface="Noto Serif SC" panose="02020200000000000000" charset="-122"/>
-              </a:rPr>
-              <a:t>一键启动脚本，无需配置</a:t>
-            </a:r>
-            <a:endParaRPr lang="en-US" sz="1000" b="0" i="0" u="none" strike="noStrike">
-              <a:solidFill>
-                <a:srgbClr val="465667"/>
-              </a:solidFill>
-              <a:latin typeface="Noto Serif SC" panose="02020200000000000000" charset="-122"/>
-              <a:ea typeface="Noto Serif SC" panose="02020200000000000000" charset="-122"/>
-              <a:cs typeface="Noto Serif SC" panose="02020200000000000000" charset="-122"/>
-              <a:sym typeface="Noto Serif SC" panose="02020200000000000000" charset="-122"/>
-            </a:endParaRPr>
-          </a:p>
-        </p:txBody>
-      </p:sp>
-      <p:sp>
-        <p:nvSpPr>
           <p:cNvPr id="32" name="AutoShape 32"/>
           <p:cNvSpPr/>
           <p:nvPr/>
@@ -23034,6 +22364,54 @@
           </a:p>
         </p:txBody>
       </p:sp>
+      <p:pic>
+        <p:nvPicPr>
+          <p:cNvPr id="36" name="图片 35"/>
+          <p:cNvPicPr>
+            <a:picLocks noChangeAspect="1"/>
+          </p:cNvPicPr>
+          <p:nvPr/>
+        </p:nvPicPr>
+        <p:blipFill>
+          <a:blip r:embed="rId17"/>
+          <a:stretch>
+            <a:fillRect/>
+          </a:stretch>
+        </p:blipFill>
+        <p:spPr>
+          <a:xfrm>
+            <a:off x="6339205" y="3695065"/>
+            <a:ext cx="5281295" cy="2688590"/>
+          </a:xfrm>
+          <a:prstGeom prst="rect">
+            <a:avLst/>
+          </a:prstGeom>
+        </p:spPr>
+      </p:pic>
+      <p:pic>
+        <p:nvPicPr>
+          <p:cNvPr id="37" name="图片 36"/>
+          <p:cNvPicPr>
+            <a:picLocks noChangeAspect="1"/>
+          </p:cNvPicPr>
+          <p:nvPr/>
+        </p:nvPicPr>
+        <p:blipFill>
+          <a:blip r:embed="rId18"/>
+          <a:stretch>
+            <a:fillRect/>
+          </a:stretch>
+        </p:blipFill>
+        <p:spPr>
+          <a:xfrm>
+            <a:off x="762000" y="3695065"/>
+            <a:ext cx="4938395" cy="2687955"/>
+          </a:xfrm>
+          <a:prstGeom prst="rect">
+            <a:avLst/>
+          </a:prstGeom>
+        </p:spPr>
+      </p:pic>
     </p:spTree>
   </p:cSld>
   <p:clrMapOvr>
@@ -23331,7 +22709,7 @@
         </p:nvSpPr>
         <p:spPr>
           <a:xfrm>
-            <a:off x="762000" y="3111500"/>
+            <a:off x="887730" y="3124200"/>
             <a:ext cx="2540000" cy="304800"/>
           </a:xfrm>
           <a:prstGeom prst="rect">
@@ -23355,7 +22733,7 @@
               <a:defRPr/>
             </a:pPr>
             <a:r>
-              <a:rPr lang="en-US" sz="1300" b="1" i="0" u="none" strike="noStrike">
+              <a:rPr lang="en-US" sz="2400" b="1" i="0" u="none" strike="noStrike">
                 <a:solidFill>
                   <a:srgbClr val="0D1B2A"/>
                 </a:solidFill>
@@ -23366,7 +22744,7 @@
               </a:rPr>
               <a:t>测试覆盖模块</a:t>
             </a:r>
-            <a:endParaRPr lang="en-US" sz="1100"/>
+            <a:endParaRPr lang="en-US" sz="2400"/>
           </a:p>
         </p:txBody>
       </p:sp>
@@ -23378,7 +22756,7 @@
         </p:nvSpPr>
         <p:spPr>
           <a:xfrm>
-            <a:off x="762000" y="3492500"/>
+            <a:off x="762000" y="3962400"/>
             <a:ext cx="2540000" cy="1778000"/>
           </a:xfrm>
           <a:prstGeom prst="rect">
@@ -23411,9 +22789,21 @@
                 <a:cs typeface="Noto Serif SC" panose="02020200000000000000" charset="-122"/>
                 <a:sym typeface="Noto Serif SC" panose="02020200000000000000" charset="-122"/>
               </a:rPr>
-              <a:t>✓ 模型加载与预测接口</a:t>
+              <a:t>✓ </a:t>
             </a:r>
-            <a:endParaRPr lang="en-US" sz="1100"/>
+            <a:r>
+              <a:rPr lang="en-US" sz="1800" b="0" i="0" u="none" strike="noStrike">
+                <a:solidFill>
+                  <a:srgbClr val="465667"/>
+                </a:solidFill>
+                <a:latin typeface="Noto Serif SC" panose="02020200000000000000" charset="-122"/>
+                <a:ea typeface="Noto Serif SC" panose="02020200000000000000" charset="-122"/>
+                <a:cs typeface="Noto Serif SC" panose="02020200000000000000" charset="-122"/>
+                <a:sym typeface="Noto Serif SC" panose="02020200000000000000" charset="-122"/>
+              </a:rPr>
+              <a:t>模型加载与预测接口</a:t>
+            </a:r>
+            <a:endParaRPr lang="en-US" sz="1800"/>
           </a:p>
           <a:p>
             <a:pPr marL="0" indent="0" algn="l">
@@ -23422,7 +22812,7 @@
               </a:lnSpc>
             </a:pPr>
             <a:r>
-              <a:rPr lang="en-US" sz="1100" b="0" i="0" u="none" strike="noStrike">
+              <a:rPr lang="en-US" sz="1800" b="0" i="0" u="none" strike="noStrike">
                 <a:solidFill>
                   <a:srgbClr val="465667"/>
                 </a:solidFill>
@@ -23433,7 +22823,7 @@
               </a:rPr>
               <a:t>✓ 参数校验与异常处理</a:t>
             </a:r>
-            <a:endParaRPr lang="en-US" sz="1100" b="0" i="0" u="none" strike="noStrike">
+            <a:endParaRPr lang="en-US" sz="1800" b="0" i="0" u="none" strike="noStrike">
               <a:solidFill>
                 <a:srgbClr val="465667"/>
               </a:solidFill>
@@ -23450,7 +22840,7 @@
               </a:lnSpc>
             </a:pPr>
             <a:r>
-              <a:rPr lang="en-US" sz="1100" b="0" i="0" u="none" strike="noStrike">
+              <a:rPr lang="en-US" sz="1800" b="0" i="0" u="none" strike="noStrike">
                 <a:solidFill>
                   <a:srgbClr val="465667"/>
                 </a:solidFill>
@@ -23461,7 +22851,7 @@
               </a:rPr>
               <a:t>✓ 参数优化建议接口</a:t>
             </a:r>
-            <a:endParaRPr lang="en-US" sz="1100" b="0" i="0" u="none" strike="noStrike">
+            <a:endParaRPr lang="en-US" sz="1800" b="0" i="0" u="none" strike="noStrike">
               <a:solidFill>
                 <a:srgbClr val="465667"/>
               </a:solidFill>
@@ -23478,7 +22868,7 @@
               </a:lnSpc>
             </a:pPr>
             <a:r>
-              <a:rPr lang="en-US" sz="1100" b="0" i="0" u="none" strike="noStrike">
+              <a:rPr lang="en-US" sz="1800" b="0" i="0" u="none" strike="noStrike">
                 <a:solidFill>
                   <a:srgbClr val="465667"/>
                 </a:solidFill>
@@ -23489,7 +22879,7 @@
               </a:rPr>
               <a:t>✓ 批量预测CSV导入</a:t>
             </a:r>
-            <a:endParaRPr lang="en-US" sz="1100" b="0" i="0" u="none" strike="noStrike">
+            <a:endParaRPr lang="en-US" sz="1800" b="0" i="0" u="none" strike="noStrike">
               <a:solidFill>
                 <a:srgbClr val="465667"/>
               </a:solidFill>
@@ -23506,7 +22896,7 @@
               </a:lnSpc>
             </a:pPr>
             <a:r>
-              <a:rPr lang="en-US" sz="1100" b="0" i="0" u="none" strike="noStrike">
+              <a:rPr lang="en-US" sz="1800" b="0" i="0" u="none" strike="noStrike">
                 <a:solidFill>
                   <a:srgbClr val="465667"/>
                 </a:solidFill>
@@ -23517,7 +22907,7 @@
               </a:rPr>
               <a:t>✓ 历史记录CRUD操作</a:t>
             </a:r>
-            <a:endParaRPr lang="en-US" sz="1100" b="0" i="0" u="none" strike="noStrike">
+            <a:endParaRPr lang="en-US" sz="1800" b="0" i="0" u="none" strike="noStrike">
               <a:solidFill>
                 <a:srgbClr val="465667"/>
               </a:solidFill>
@@ -23534,7 +22924,7 @@
               </a:lnSpc>
             </a:pPr>
             <a:r>
-              <a:rPr lang="en-US" sz="1100" b="0" i="0" u="none" strike="noStrike">
+              <a:rPr lang="en-US" sz="1800" b="0" i="0" u="none" strike="noStrike">
                 <a:solidFill>
                   <a:srgbClr val="465667"/>
                 </a:solidFill>
@@ -23545,7 +22935,7 @@
               </a:rPr>
               <a:t>✓ 特征重要性与统计接口</a:t>
             </a:r>
-            <a:endParaRPr lang="en-US" sz="1100" b="0" i="0" u="none" strike="noStrike">
+            <a:endParaRPr lang="en-US" sz="1800" b="0" i="0" u="none" strike="noStrike">
               <a:solidFill>
                 <a:srgbClr val="465667"/>
               </a:solidFill>
@@ -23562,7 +22952,7 @@
               </a:lnSpc>
             </a:pPr>
             <a:r>
-              <a:rPr lang="en-US" sz="1100" b="0" i="0" u="none" strike="noStrike">
+              <a:rPr lang="en-US" sz="1800" b="0" i="0" u="none" strike="noStrike">
                 <a:solidFill>
                   <a:srgbClr val="465667"/>
                 </a:solidFill>
@@ -23573,7 +22963,7 @@
               </a:rPr>
               <a:t>✓ 智能建议与导出功能</a:t>
             </a:r>
-            <a:endParaRPr lang="en-US" sz="1100" b="0" i="0" u="none" strike="noStrike">
+            <a:endParaRPr lang="en-US" sz="1800" b="0" i="0" u="none" strike="noStrike">
               <a:solidFill>
                 <a:srgbClr val="465667"/>
               </a:solidFill>
@@ -23617,7 +23007,7 @@
               <a:defRPr/>
             </a:pPr>
             <a:r>
-              <a:rPr lang="en-US" sz="1300" b="1" i="0" u="none" strike="noStrike">
+              <a:rPr lang="en-US" sz="1600" b="1" i="0" u="none" strike="noStrike">
                 <a:solidFill>
                   <a:srgbClr val="0D1B2A"/>
                 </a:solidFill>
@@ -23628,7 +23018,7 @@
               </a:rPr>
               <a:t>集成测试验证</a:t>
             </a:r>
-            <a:endParaRPr lang="en-US" sz="1100"/>
+            <a:endParaRPr lang="en-US" sz="1600"/>
           </a:p>
         </p:txBody>
       </p:sp>
@@ -24063,8 +23453,8 @@
         </p:nvSpPr>
         <p:spPr>
           <a:xfrm>
-            <a:off x="3810000" y="3429000"/>
-            <a:ext cx="3556000" cy="508000"/>
+            <a:off x="3872865" y="3609975"/>
+            <a:ext cx="3556000" cy="606425"/>
           </a:xfrm>
           <a:prstGeom prst="rect">
             <a:avLst/>
@@ -24086,6 +23476,18 @@
               </a:lnSpc>
               <a:defRPr/>
             </a:pPr>
+            <a:r>
+              <a:rPr lang="en-US" sz="2000" b="0" i="0" u="none" strike="noStrike">
+                <a:solidFill>
+                  <a:srgbClr val="64748B"/>
+                </a:solidFill>
+                <a:latin typeface="Noto Serif SC" panose="02020200000000000000" charset="-122"/>
+                <a:ea typeface="Noto Serif SC" panose="02020200000000000000" charset="-122"/>
+                <a:cs typeface="Noto Serif SC" panose="02020200000000000000" charset="-122"/>
+                <a:sym typeface="Noto Serif SC" panose="02020200000000000000" charset="-122"/>
+              </a:rPr>
+              <a:t>模型对正常与异常参数区分明显，三级风险判定符合预期</a:t>
+            </a:r>
             <a:r>
               <a:rPr lang="en-US" sz="1000" b="0" i="0" u="none" strike="noStrike">
                 <a:solidFill>
@@ -24096,7 +23498,7 @@
                 <a:cs typeface="Noto Serif SC" panose="02020200000000000000" charset="-122"/>
                 <a:sym typeface="Noto Serif SC" panose="02020200000000000000" charset="-122"/>
               </a:rPr>
-              <a:t>模型对正常与异常参数区分明显，三级风险判定符合预期。</a:t>
+              <a:t>。</a:t>
             </a:r>
             <a:endParaRPr lang="en-US" sz="1100"/>
           </a:p>
@@ -24110,7 +23512,7 @@
         </p:nvSpPr>
         <p:spPr>
           <a:xfrm>
-            <a:off x="7874000" y="1333500"/>
+            <a:off x="8064500" y="1333500"/>
             <a:ext cx="2540000" cy="304800"/>
           </a:xfrm>
           <a:prstGeom prst="rect">
@@ -24134,7 +23536,7 @@
               <a:defRPr/>
             </a:pPr>
             <a:r>
-              <a:rPr lang="en-US" sz="1300" b="1" i="0" u="none" strike="noStrike">
+              <a:rPr lang="en-US" sz="1600" b="1" i="0" u="none" strike="noStrike">
                 <a:solidFill>
                   <a:srgbClr val="0D1B2A"/>
                 </a:solidFill>
@@ -24145,7 +23547,7 @@
               </a:rPr>
               <a:t>调试问题与修复</a:t>
             </a:r>
-            <a:endParaRPr lang="en-US" sz="1100"/>
+            <a:endParaRPr lang="en-US" sz="1600"/>
           </a:p>
         </p:txBody>
       </p:sp>
@@ -24153,7 +23555,11 @@
         <p:nvSpPr>
           <p:cNvPr id="14" name="AutoShape 14"/>
           <p:cNvSpPr/>
-          <p:nvPr/>
+          <p:nvPr>
+            <p:custDataLst>
+              <p:tags r:id="rId1"/>
+            </p:custDataLst>
+          </p:nvPr>
         </p:nvSpPr>
         <p:spPr>
           <a:xfrm>
@@ -24194,7 +23600,11 @@
         <p:nvSpPr>
           <p:cNvPr id="15" name="AutoShape 15"/>
           <p:cNvSpPr/>
-          <p:nvPr/>
+          <p:nvPr>
+            <p:custDataLst>
+              <p:tags r:id="rId2"/>
+            </p:custDataLst>
+          </p:nvPr>
         </p:nvSpPr>
         <p:spPr>
           <a:xfrm>
@@ -24222,7 +23632,7 @@
               <a:defRPr/>
             </a:pPr>
             <a:r>
-              <a:rPr lang="en-US" sz="1100" b="1" i="0" u="none" strike="noStrike">
+              <a:rPr lang="en-US" b="1" i="0" u="none" strike="noStrike">
                 <a:solidFill>
                   <a:srgbClr val="0D1B2A"/>
                 </a:solidFill>
@@ -24233,7 +23643,7 @@
               </a:rPr>
               <a:t>问题1：非JSON请求返回500</a:t>
             </a:r>
-            <a:endParaRPr lang="en-US" sz="1100"/>
+            <a:endParaRPr lang="en-US"/>
           </a:p>
         </p:txBody>
       </p:sp>
@@ -24241,7 +23651,11 @@
         <p:nvSpPr>
           <p:cNvPr id="16" name="AutoShape 16"/>
           <p:cNvSpPr/>
-          <p:nvPr/>
+          <p:nvPr>
+            <p:custDataLst>
+              <p:tags r:id="rId3"/>
+            </p:custDataLst>
+          </p:nvPr>
         </p:nvSpPr>
         <p:spPr>
           <a:xfrm>
@@ -24269,7 +23683,7 @@
               <a:defRPr/>
             </a:pPr>
             <a:r>
-              <a:rPr lang="en-US" sz="1000" b="0" i="0" u="none" strike="noStrike">
+              <a:rPr lang="en-US" b="0" i="0" u="none" strike="noStrike">
                 <a:solidFill>
                   <a:srgbClr val="465667"/>
                 </a:solidFill>
@@ -24280,7 +23694,7 @@
               </a:rPr>
               <a:t>修复：改用 get_json(silent=True)，空请求返回400而非500。</a:t>
             </a:r>
-            <a:endParaRPr lang="en-US" sz="1100"/>
+            <a:endParaRPr lang="en-US"/>
           </a:p>
         </p:txBody>
       </p:sp>
@@ -24288,7 +23702,11 @@
         <p:nvSpPr>
           <p:cNvPr id="17" name="AutoShape 17"/>
           <p:cNvSpPr/>
-          <p:nvPr/>
+          <p:nvPr>
+            <p:custDataLst>
+              <p:tags r:id="rId4"/>
+            </p:custDataLst>
+          </p:nvPr>
         </p:nvSpPr>
         <p:spPr>
           <a:xfrm>
@@ -24329,7 +23747,11 @@
         <p:nvSpPr>
           <p:cNvPr id="18" name="AutoShape 18"/>
           <p:cNvSpPr/>
-          <p:nvPr/>
+          <p:nvPr>
+            <p:custDataLst>
+              <p:tags r:id="rId5"/>
+            </p:custDataLst>
+          </p:nvPr>
         </p:nvSpPr>
         <p:spPr>
           <a:xfrm>
@@ -24357,7 +23779,7 @@
               <a:defRPr/>
             </a:pPr>
             <a:r>
-              <a:rPr lang="en-US" sz="1100" b="1" i="0" u="none" strike="noStrike">
+              <a:rPr lang="en-US" b="1" i="0" u="none" strike="noStrike">
                 <a:solidFill>
                   <a:srgbClr val="0D1B2A"/>
                 </a:solidFill>
@@ -24368,7 +23790,7 @@
               </a:rPr>
               <a:t>问题2：特征名不匹配报错</a:t>
             </a:r>
-            <a:endParaRPr lang="en-US" sz="1100"/>
+            <a:endParaRPr lang="en-US"/>
           </a:p>
         </p:txBody>
       </p:sp>
@@ -24376,7 +23798,11 @@
         <p:nvSpPr>
           <p:cNvPr id="19" name="AutoShape 19"/>
           <p:cNvSpPr/>
-          <p:nvPr/>
+          <p:nvPr>
+            <p:custDataLst>
+              <p:tags r:id="rId6"/>
+            </p:custDataLst>
+          </p:nvPr>
         </p:nvSpPr>
         <p:spPr>
           <a:xfrm>
@@ -24404,7 +23830,7 @@
               <a:defRPr/>
             </a:pPr>
             <a:r>
-              <a:rPr lang="en-US" sz="1000" b="0" i="0" u="none" strike="noStrike">
+              <a:rPr lang="en-US" b="0" i="0" u="none" strike="noStrike">
                 <a:solidFill>
                   <a:srgbClr val="465667"/>
                 </a:solidFill>
@@ -24415,7 +23841,7 @@
               </a:rPr>
               <a:t>修复：引入feature_map.json映射原始列名，保留特征名。</a:t>
             </a:r>
-            <a:endParaRPr lang="en-US" sz="1100"/>
+            <a:endParaRPr lang="en-US"/>
           </a:p>
         </p:txBody>
       </p:sp>
@@ -24423,7 +23849,11 @@
         <p:nvSpPr>
           <p:cNvPr id="20" name="AutoShape 20"/>
           <p:cNvSpPr/>
-          <p:nvPr/>
+          <p:nvPr>
+            <p:custDataLst>
+              <p:tags r:id="rId7"/>
+            </p:custDataLst>
+          </p:nvPr>
         </p:nvSpPr>
         <p:spPr>
           <a:xfrm>
@@ -24460,7 +23890,11 @@
         <p:nvSpPr>
           <p:cNvPr id="21" name="AutoShape 21"/>
           <p:cNvSpPr/>
-          <p:nvPr/>
+          <p:nvPr>
+            <p:custDataLst>
+              <p:tags r:id="rId8"/>
+            </p:custDataLst>
+          </p:nvPr>
         </p:nvSpPr>
         <p:spPr>
           <a:xfrm>
@@ -24488,7 +23922,7 @@
               <a:defRPr/>
             </a:pPr>
             <a:r>
-              <a:rPr lang="en-US" sz="1100" b="1" i="0" u="none" strike="noStrike">
+              <a:rPr lang="en-US" b="1" i="0" u="none" strike="noStrike">
                 <a:solidFill>
                   <a:srgbClr val="C9A66B"/>
                 </a:solidFill>
@@ -24499,7 +23933,7 @@
               </a:rPr>
               <a:t>问题3：批量预测列名不识别</a:t>
             </a:r>
-            <a:endParaRPr lang="en-US" sz="1100"/>
+            <a:endParaRPr lang="en-US"/>
           </a:p>
         </p:txBody>
       </p:sp>
@@ -24507,7 +23941,11 @@
         <p:nvSpPr>
           <p:cNvPr id="22" name="AutoShape 22"/>
           <p:cNvSpPr/>
-          <p:nvPr/>
+          <p:nvPr>
+            <p:custDataLst>
+              <p:tags r:id="rId9"/>
+            </p:custDataLst>
+          </p:nvPr>
         </p:nvSpPr>
         <p:spPr>
           <a:xfrm>
@@ -24535,7 +23973,7 @@
               <a:defRPr/>
             </a:pPr>
             <a:r>
-              <a:rPr lang="en-US" sz="1000" b="0" i="0" u="none" strike="noStrike">
+              <a:rPr lang="en-US" b="0" i="0" u="none" strike="noStrike">
                 <a:solidFill>
                   <a:srgbClr val="FFFFFF">
                     <a:alpha val="80000"/>
@@ -24548,7 +23986,7 @@
               </a:rPr>
               <a:t>修复：扩展列名映射，支持中英文及多种命名变体。</a:t>
             </a:r>
-            <a:endParaRPr lang="en-US" sz="1100"/>
+            <a:endParaRPr lang="en-US"/>
           </a:p>
         </p:txBody>
       </p:sp>
@@ -24560,7 +23998,7 @@
         </p:nvSpPr>
         <p:spPr>
           <a:xfrm>
-            <a:off x="762000" y="6286500"/>
+            <a:off x="762000" y="6273800"/>
             <a:ext cx="10668000" cy="254000"/>
           </a:xfrm>
           <a:prstGeom prst="rect">
@@ -24889,7 +24327,7 @@
                 <a:cs typeface="Noto Serif SC" panose="02020200000000000000" charset="-122"/>
                 <a:sym typeface="Noto Serif SC" panose="02020200000000000000" charset="-122"/>
               </a:rPr>
-              <a:t> 随机森林模型，准确率62.2%，召回率65.9%</a:t>
+              <a:t> 随机森林模型，准确率72.2%，召回率75.9%</a:t>
             </a:r>
             <a:endParaRPr lang="en-US" sz="1300" b="0" i="0" u="none" strike="noStrike">
               <a:solidFill>
@@ -25203,7 +24641,7 @@
                 <a:cs typeface="Noto Serif SC" panose="02020200000000000000" charset="-122"/>
                 <a:sym typeface="Noto Serif SC" panose="02020200000000000000" charset="-122"/>
               </a:rPr>
-              <a:t>· 准确率62.2%仍有提升空间，未做超参数调优</a:t>
+              <a:t>· 准确率72.2%仍有提升空间，未做超参数调优</a:t>
             </a:r>
             <a:endParaRPr lang="en-US" sz="1200" b="0" i="0" u="none" strike="noStrike">
               <a:solidFill>
@@ -25515,6 +24953,156 @@
     <a:masterClrMapping/>
   </p:clrMapOvr>
 </p:sld>
+</file>
+
+<file path=ppt/tags/tag1.xml><?xml version="1.0" encoding="utf-8"?>
+<p:tagLst xmlns:p="http://schemas.openxmlformats.org/presentationml/2006/main">
+  <p:tag name="KSO_WM_DIAGRAM_VIRTUALLY_FRAME" val="{&quot;height&quot;:140,&quot;left&quot;:60,&quot;top&quot;:110,&quot;width&quot;:860}"/>
+</p:tagLst>
+</file>
+
+<file path=ppt/tags/tag10.xml><?xml version="1.0" encoding="utf-8"?>
+<p:tagLst xmlns:p="http://schemas.openxmlformats.org/presentationml/2006/main">
+  <p:tag name="KSO_WM_DIAGRAM_VIRTUALLY_FRAME" val="{&quot;height&quot;:140,&quot;left&quot;:60,&quot;top&quot;:110,&quot;width&quot;:860}"/>
+</p:tagLst>
+</file>
+
+<file path=ppt/tags/tag11.xml><?xml version="1.0" encoding="utf-8"?>
+<p:tagLst xmlns:p="http://schemas.openxmlformats.org/presentationml/2006/main">
+  <p:tag name="KSO_WM_DIAGRAM_VIRTUALLY_FRAME" val="{&quot;height&quot;:140,&quot;left&quot;:60,&quot;top&quot;:110,&quot;width&quot;:860}"/>
+</p:tagLst>
+</file>
+
+<file path=ppt/tags/tag12.xml><?xml version="1.0" encoding="utf-8"?>
+<p:tagLst xmlns:p="http://schemas.openxmlformats.org/presentationml/2006/main">
+  <p:tag name="KSO_WM_DIAGRAM_VIRTUALLY_FRAME" val="{&quot;height&quot;:140,&quot;left&quot;:60,&quot;top&quot;:110,&quot;width&quot;:860}"/>
+</p:tagLst>
+</file>
+
+<file path=ppt/tags/tag13.xml><?xml version="1.0" encoding="utf-8"?>
+<p:tagLst xmlns:p="http://schemas.openxmlformats.org/presentationml/2006/main">
+  <p:tag name="KSO_WM_DIAGRAM_VIRTUALLY_FRAME" val="{&quot;height&quot;:140,&quot;left&quot;:60,&quot;top&quot;:110,&quot;width&quot;:860}"/>
+</p:tagLst>
+</file>
+
+<file path=ppt/tags/tag14.xml><?xml version="1.0" encoding="utf-8"?>
+<p:tagLst xmlns:p="http://schemas.openxmlformats.org/presentationml/2006/main">
+  <p:tag name="KSO_WM_DIAGRAM_VIRTUALLY_FRAME" val="{&quot;height&quot;:140,&quot;left&quot;:60,&quot;top&quot;:110,&quot;width&quot;:860}"/>
+</p:tagLst>
+</file>
+
+<file path=ppt/tags/tag15.xml><?xml version="1.0" encoding="utf-8"?>
+<p:tagLst xmlns:p="http://schemas.openxmlformats.org/presentationml/2006/main">
+  <p:tag name="KSO_WM_DIAGRAM_VIRTUALLY_FRAME" val="{&quot;height&quot;:140,&quot;left&quot;:60,&quot;top&quot;:110,&quot;width&quot;:860}"/>
+</p:tagLst>
+</file>
+
+<file path=ppt/tags/tag16.xml><?xml version="1.0" encoding="utf-8"?>
+<p:tagLst xmlns:p="http://schemas.openxmlformats.org/presentationml/2006/main">
+  <p:tag name="KSO_WM_DIAGRAM_VIRTUALLY_FRAME" val="{&quot;height&quot;:140,&quot;left&quot;:60,&quot;top&quot;:110,&quot;width&quot;:860}"/>
+</p:tagLst>
+</file>
+
+<file path=ppt/tags/tag17.xml><?xml version="1.0" encoding="utf-8"?>
+<p:tagLst xmlns:p="http://schemas.openxmlformats.org/presentationml/2006/main">
+  <p:tag name="KSO_WM_DIAGRAM_VIRTUALLY_FRAME" val="{&quot;height&quot;:275,&quot;left&quot;:620,&quot;top&quot;:135,&quot;width&quot;:280}"/>
+</p:tagLst>
+</file>
+
+<file path=ppt/tags/tag18.xml><?xml version="1.0" encoding="utf-8"?>
+<p:tagLst xmlns:p="http://schemas.openxmlformats.org/presentationml/2006/main">
+  <p:tag name="KSO_WM_DIAGRAM_VIRTUALLY_FRAME" val="{&quot;height&quot;:275,&quot;left&quot;:620,&quot;top&quot;:135,&quot;width&quot;:280}"/>
+</p:tagLst>
+</file>
+
+<file path=ppt/tags/tag19.xml><?xml version="1.0" encoding="utf-8"?>
+<p:tagLst xmlns:p="http://schemas.openxmlformats.org/presentationml/2006/main">
+  <p:tag name="KSO_WM_DIAGRAM_VIRTUALLY_FRAME" val="{&quot;height&quot;:275,&quot;left&quot;:620,&quot;top&quot;:135,&quot;width&quot;:280}"/>
+</p:tagLst>
+</file>
+
+<file path=ppt/tags/tag2.xml><?xml version="1.0" encoding="utf-8"?>
+<p:tagLst xmlns:p="http://schemas.openxmlformats.org/presentationml/2006/main">
+  <p:tag name="KSO_WM_DIAGRAM_VIRTUALLY_FRAME" val="{&quot;height&quot;:140,&quot;left&quot;:60,&quot;top&quot;:110,&quot;width&quot;:860}"/>
+</p:tagLst>
+</file>
+
+<file path=ppt/tags/tag20.xml><?xml version="1.0" encoding="utf-8"?>
+<p:tagLst xmlns:p="http://schemas.openxmlformats.org/presentationml/2006/main">
+  <p:tag name="KSO_WM_DIAGRAM_VIRTUALLY_FRAME" val="{&quot;height&quot;:275,&quot;left&quot;:620,&quot;top&quot;:135,&quot;width&quot;:280}"/>
+</p:tagLst>
+</file>
+
+<file path=ppt/tags/tag21.xml><?xml version="1.0" encoding="utf-8"?>
+<p:tagLst xmlns:p="http://schemas.openxmlformats.org/presentationml/2006/main">
+  <p:tag name="KSO_WM_DIAGRAM_VIRTUALLY_FRAME" val="{&quot;height&quot;:275,&quot;left&quot;:620,&quot;top&quot;:135,&quot;width&quot;:280}"/>
+</p:tagLst>
+</file>
+
+<file path=ppt/tags/tag22.xml><?xml version="1.0" encoding="utf-8"?>
+<p:tagLst xmlns:p="http://schemas.openxmlformats.org/presentationml/2006/main">
+  <p:tag name="KSO_WM_DIAGRAM_VIRTUALLY_FRAME" val="{&quot;height&quot;:275,&quot;left&quot;:620,&quot;top&quot;:135,&quot;width&quot;:280}"/>
+</p:tagLst>
+</file>
+
+<file path=ppt/tags/tag23.xml><?xml version="1.0" encoding="utf-8"?>
+<p:tagLst xmlns:p="http://schemas.openxmlformats.org/presentationml/2006/main">
+  <p:tag name="KSO_WM_DIAGRAM_VIRTUALLY_FRAME" val="{&quot;height&quot;:275,&quot;left&quot;:620,&quot;top&quot;:135,&quot;width&quot;:280}"/>
+</p:tagLst>
+</file>
+
+<file path=ppt/tags/tag24.xml><?xml version="1.0" encoding="utf-8"?>
+<p:tagLst xmlns:p="http://schemas.openxmlformats.org/presentationml/2006/main">
+  <p:tag name="KSO_WM_DIAGRAM_VIRTUALLY_FRAME" val="{&quot;height&quot;:275,&quot;left&quot;:620,&quot;top&quot;:135,&quot;width&quot;:280}"/>
+</p:tagLst>
+</file>
+
+<file path=ppt/tags/tag25.xml><?xml version="1.0" encoding="utf-8"?>
+<p:tagLst xmlns:p="http://schemas.openxmlformats.org/presentationml/2006/main">
+  <p:tag name="KSO_WM_DIAGRAM_VIRTUALLY_FRAME" val="{&quot;height&quot;:275,&quot;left&quot;:620,&quot;top&quot;:135,&quot;width&quot;:280}"/>
+</p:tagLst>
+</file>
+
+<file path=ppt/tags/tag3.xml><?xml version="1.0" encoding="utf-8"?>
+<p:tagLst xmlns:p="http://schemas.openxmlformats.org/presentationml/2006/main">
+  <p:tag name="KSO_WM_DIAGRAM_VIRTUALLY_FRAME" val="{&quot;height&quot;:140,&quot;left&quot;:60,&quot;top&quot;:110,&quot;width&quot;:860}"/>
+</p:tagLst>
+</file>
+
+<file path=ppt/tags/tag4.xml><?xml version="1.0" encoding="utf-8"?>
+<p:tagLst xmlns:p="http://schemas.openxmlformats.org/presentationml/2006/main">
+  <p:tag name="KSO_WM_DIAGRAM_VIRTUALLY_FRAME" val="{&quot;height&quot;:140,&quot;left&quot;:60,&quot;top&quot;:110,&quot;width&quot;:860}"/>
+</p:tagLst>
+</file>
+
+<file path=ppt/tags/tag5.xml><?xml version="1.0" encoding="utf-8"?>
+<p:tagLst xmlns:p="http://schemas.openxmlformats.org/presentationml/2006/main">
+  <p:tag name="KSO_WM_DIAGRAM_VIRTUALLY_FRAME" val="{&quot;height&quot;:140,&quot;left&quot;:60,&quot;top&quot;:110,&quot;width&quot;:860}"/>
+</p:tagLst>
+</file>
+
+<file path=ppt/tags/tag6.xml><?xml version="1.0" encoding="utf-8"?>
+<p:tagLst xmlns:p="http://schemas.openxmlformats.org/presentationml/2006/main">
+  <p:tag name="KSO_WM_DIAGRAM_VIRTUALLY_FRAME" val="{&quot;height&quot;:140,&quot;left&quot;:60,&quot;top&quot;:110,&quot;width&quot;:860}"/>
+</p:tagLst>
+</file>
+
+<file path=ppt/tags/tag7.xml><?xml version="1.0" encoding="utf-8"?>
+<p:tagLst xmlns:p="http://schemas.openxmlformats.org/presentationml/2006/main">
+  <p:tag name="KSO_WM_DIAGRAM_VIRTUALLY_FRAME" val="{&quot;height&quot;:140,&quot;left&quot;:60,&quot;top&quot;:110,&quot;width&quot;:860}"/>
+</p:tagLst>
+</file>
+
+<file path=ppt/tags/tag8.xml><?xml version="1.0" encoding="utf-8"?>
+<p:tagLst xmlns:p="http://schemas.openxmlformats.org/presentationml/2006/main">
+  <p:tag name="KSO_WM_DIAGRAM_VIRTUALLY_FRAME" val="{&quot;height&quot;:140,&quot;left&quot;:60,&quot;top&quot;:110,&quot;width&quot;:860}"/>
+</p:tagLst>
+</file>
+
+<file path=ppt/tags/tag9.xml><?xml version="1.0" encoding="utf-8"?>
+<p:tagLst xmlns:p="http://schemas.openxmlformats.org/presentationml/2006/main">
+  <p:tag name="KSO_WM_DIAGRAM_VIRTUALLY_FRAME" val="{&quot;height&quot;:140,&quot;left&quot;:60,&quot;top&quot;:110,&quot;width&quot;:860}"/>
+</p:tagLst>
 </file>
 
 <file path=ppt/theme/theme1.xml><?xml version="1.0" encoding="utf-8"?>
